--- a/data-eng/decks/w3d2s4.pptx
+++ b/data-eng/decks/w3d2s4.pptx
@@ -3099,7 +3099,7 @@
       <p:grpSpPr/>
       <p:sp>
         <p:nvSpPr>
-          <p:cNvPr id="2" name="Oval 1"/>
+          <p:cNvPr id="2" name="deckgen:decor"/>
           <p:cNvSpPr/>
           <p:nvPr/>
         </p:nvSpPr>
@@ -3129,7 +3129,7 @@
       </p:sp>
       <p:sp>
         <p:nvSpPr>
-          <p:cNvPr id="3" name="Oval 2"/>
+          <p:cNvPr id="3" name="deckgen:decor"/>
           <p:cNvSpPr/>
           <p:nvPr/>
         </p:nvSpPr>
@@ -3159,7 +3159,7 @@
       </p:sp>
       <p:sp>
         <p:nvSpPr>
-          <p:cNvPr id="4" name="Oval 3"/>
+          <p:cNvPr id="4" name="deckgen:decor"/>
           <p:cNvSpPr/>
           <p:nvPr/>
         </p:nvSpPr>
@@ -3189,7 +3189,7 @@
       </p:sp>
       <p:sp>
         <p:nvSpPr>
-          <p:cNvPr id="5" name="Rectangle 4"/>
+          <p:cNvPr id="5" name="deckgen:decor"/>
           <p:cNvSpPr/>
           <p:nvPr/>
         </p:nvSpPr>
@@ -3219,7 +3219,7 @@
       </p:sp>
       <p:sp>
         <p:nvSpPr>
-          <p:cNvPr id="6" name="Oval 5"/>
+          <p:cNvPr id="6" name="deckgen:decor"/>
           <p:cNvSpPr/>
           <p:nvPr/>
         </p:nvSpPr>
@@ -3249,7 +3249,7 @@
       </p:sp>
       <p:sp>
         <p:nvSpPr>
-          <p:cNvPr id="7" name="Oval 6"/>
+          <p:cNvPr id="7" name="deckgen:decor"/>
           <p:cNvSpPr/>
           <p:nvPr/>
         </p:nvSpPr>
@@ -3279,7 +3279,7 @@
       </p:sp>
       <p:sp>
         <p:nvSpPr>
-          <p:cNvPr id="8" name="Oval 7"/>
+          <p:cNvPr id="8" name="deckgen:decor"/>
           <p:cNvSpPr/>
           <p:nvPr/>
         </p:nvSpPr>
@@ -3309,7 +3309,7 @@
       </p:sp>
       <p:sp>
         <p:nvSpPr>
-          <p:cNvPr id="9" name="Oval 8"/>
+          <p:cNvPr id="9" name="deckgen:decor"/>
           <p:cNvSpPr/>
           <p:nvPr/>
         </p:nvSpPr>
@@ -3339,7 +3339,7 @@
       </p:sp>
       <p:sp>
         <p:nvSpPr>
-          <p:cNvPr id="10" name="Rectangle 9"/>
+          <p:cNvPr id="10" name="deckgen:decor"/>
           <p:cNvSpPr/>
           <p:nvPr/>
         </p:nvSpPr>
@@ -3599,7 +3599,7 @@
       <p:grpSpPr/>
       <p:sp>
         <p:nvSpPr>
-          <p:cNvPr id="2" name="Oval 1"/>
+          <p:cNvPr id="2" name="deckgen:decor"/>
           <p:cNvSpPr/>
           <p:nvPr/>
         </p:nvSpPr>
@@ -3629,7 +3629,7 @@
       </p:sp>
       <p:sp>
         <p:nvSpPr>
-          <p:cNvPr id="3" name="Oval 2"/>
+          <p:cNvPr id="3" name="deckgen:decor"/>
           <p:cNvSpPr/>
           <p:nvPr/>
         </p:nvSpPr>
@@ -4406,7 +4406,7 @@
       <p:grpSpPr/>
       <p:sp>
         <p:nvSpPr>
-          <p:cNvPr id="2" name="Oval 1"/>
+          <p:cNvPr id="2" name="deckgen:decor"/>
           <p:cNvSpPr/>
           <p:nvPr/>
         </p:nvSpPr>
@@ -4436,7 +4436,7 @@
       </p:sp>
       <p:sp>
         <p:nvSpPr>
-          <p:cNvPr id="3" name="Oval 2"/>
+          <p:cNvPr id="3" name="deckgen:decor"/>
           <p:cNvSpPr/>
           <p:nvPr/>
         </p:nvSpPr>
@@ -4466,7 +4466,7 @@
       </p:sp>
       <p:sp>
         <p:nvSpPr>
-          <p:cNvPr id="4" name="Oval 3"/>
+          <p:cNvPr id="4" name="deckgen:decor"/>
           <p:cNvSpPr/>
           <p:nvPr/>
         </p:nvSpPr>
@@ -5397,7 +5397,7 @@
       <p:grpSpPr/>
       <p:sp>
         <p:nvSpPr>
-          <p:cNvPr id="2" name="Oval 1"/>
+          <p:cNvPr id="2" name="deckgen:decor"/>
           <p:cNvSpPr/>
           <p:nvPr/>
         </p:nvSpPr>
@@ -5427,7 +5427,7 @@
       </p:sp>
       <p:sp>
         <p:nvSpPr>
-          <p:cNvPr id="3" name="Oval 2"/>
+          <p:cNvPr id="3" name="deckgen:decor"/>
           <p:cNvSpPr/>
           <p:nvPr/>
         </p:nvSpPr>
@@ -5457,7 +5457,7 @@
       </p:sp>
       <p:sp>
         <p:nvSpPr>
-          <p:cNvPr id="4" name="Oval 3"/>
+          <p:cNvPr id="4" name="deckgen:decor"/>
           <p:cNvSpPr/>
           <p:nvPr/>
         </p:nvSpPr>
@@ -7162,7 +7162,7 @@
       <p:grpSpPr/>
       <p:sp>
         <p:nvSpPr>
-          <p:cNvPr id="2" name="Oval 1"/>
+          <p:cNvPr id="2" name="deckgen:decor"/>
           <p:cNvSpPr/>
           <p:nvPr/>
         </p:nvSpPr>
@@ -7192,7 +7192,7 @@
       </p:sp>
       <p:sp>
         <p:nvSpPr>
-          <p:cNvPr id="3" name="Oval 2"/>
+          <p:cNvPr id="3" name="deckgen:decor"/>
           <p:cNvSpPr/>
           <p:nvPr/>
         </p:nvSpPr>
@@ -7222,7 +7222,7 @@
       </p:sp>
       <p:sp>
         <p:nvSpPr>
-          <p:cNvPr id="4" name="Oval 3"/>
+          <p:cNvPr id="4" name="deckgen:decor"/>
           <p:cNvSpPr/>
           <p:nvPr/>
         </p:nvSpPr>
@@ -8873,7 +8873,7 @@
       <p:grpSpPr/>
       <p:sp>
         <p:nvSpPr>
-          <p:cNvPr id="2" name="Oval 1"/>
+          <p:cNvPr id="2" name="deckgen:decor"/>
           <p:cNvSpPr/>
           <p:nvPr/>
         </p:nvSpPr>
@@ -8903,7 +8903,7 @@
       </p:sp>
       <p:sp>
         <p:nvSpPr>
-          <p:cNvPr id="3" name="Oval 2"/>
+          <p:cNvPr id="3" name="deckgen:decor"/>
           <p:cNvSpPr/>
           <p:nvPr/>
         </p:nvSpPr>
@@ -8933,7 +8933,7 @@
       </p:sp>
       <p:sp>
         <p:nvSpPr>
-          <p:cNvPr id="4" name="Oval 3"/>
+          <p:cNvPr id="4" name="deckgen:decor"/>
           <p:cNvSpPr/>
           <p:nvPr/>
         </p:nvSpPr>
@@ -9966,7 +9966,7 @@
       <p:grpSpPr/>
       <p:sp>
         <p:nvSpPr>
-          <p:cNvPr id="2" name="Oval 1"/>
+          <p:cNvPr id="2" name="deckgen:decor"/>
           <p:cNvSpPr/>
           <p:nvPr/>
         </p:nvSpPr>
@@ -9996,7 +9996,7 @@
       </p:sp>
       <p:sp>
         <p:nvSpPr>
-          <p:cNvPr id="3" name="Oval 2"/>
+          <p:cNvPr id="3" name="deckgen:decor"/>
           <p:cNvSpPr/>
           <p:nvPr/>
         </p:nvSpPr>
@@ -10026,7 +10026,7 @@
       </p:sp>
       <p:sp>
         <p:nvSpPr>
-          <p:cNvPr id="4" name="Oval 3"/>
+          <p:cNvPr id="4" name="deckgen:decor"/>
           <p:cNvSpPr/>
           <p:nvPr/>
         </p:nvSpPr>
@@ -10131,7 +10131,7 @@
                 <a:ea typeface="Pretendard"/>
                 <a:cs typeface="Pretendard"/>
               </a:rPr>
-              <a:t>여덟 개를 스스로 확인해 보세요</a:t>
+              <a:t>체크리스트 — 스스로 확인해 보세요</a:t>
             </a:r>
           </a:p>
         </p:txBody>
@@ -11466,7 +11466,7 @@
       <p:grpSpPr/>
       <p:sp>
         <p:nvSpPr>
-          <p:cNvPr id="2" name="Oval 1"/>
+          <p:cNvPr id="2" name="deckgen:decor"/>
           <p:cNvSpPr/>
           <p:nvPr/>
         </p:nvSpPr>
@@ -11496,7 +11496,7 @@
       </p:sp>
       <p:sp>
         <p:nvSpPr>
-          <p:cNvPr id="3" name="Oval 2"/>
+          <p:cNvPr id="3" name="deckgen:decor"/>
           <p:cNvSpPr/>
           <p:nvPr/>
         </p:nvSpPr>
@@ -11526,7 +11526,7 @@
       </p:sp>
       <p:sp>
         <p:nvSpPr>
-          <p:cNvPr id="4" name="Oval 3"/>
+          <p:cNvPr id="4" name="deckgen:decor"/>
           <p:cNvSpPr/>
           <p:nvPr/>
         </p:nvSpPr>
@@ -13168,7 +13168,7 @@
       <p:grpSpPr/>
       <p:sp>
         <p:nvSpPr>
-          <p:cNvPr id="2" name="Oval 1"/>
+          <p:cNvPr id="2" name="deckgen:decor"/>
           <p:cNvSpPr/>
           <p:nvPr/>
         </p:nvSpPr>
@@ -13198,7 +13198,7 @@
       </p:sp>
       <p:sp>
         <p:nvSpPr>
-          <p:cNvPr id="3" name="Oval 2"/>
+          <p:cNvPr id="3" name="deckgen:decor"/>
           <p:cNvSpPr/>
           <p:nvPr/>
         </p:nvSpPr>
@@ -13228,7 +13228,7 @@
       </p:sp>
       <p:sp>
         <p:nvSpPr>
-          <p:cNvPr id="4" name="Oval 3"/>
+          <p:cNvPr id="4" name="deckgen:decor"/>
           <p:cNvSpPr/>
           <p:nvPr/>
         </p:nvSpPr>
@@ -14288,7 +14288,7 @@
       <p:grpSpPr/>
       <p:sp>
         <p:nvSpPr>
-          <p:cNvPr id="2" name="Oval 1"/>
+          <p:cNvPr id="2" name="deckgen:decor"/>
           <p:cNvSpPr/>
           <p:nvPr/>
         </p:nvSpPr>
@@ -14318,7 +14318,7 @@
       </p:sp>
       <p:sp>
         <p:nvSpPr>
-          <p:cNvPr id="3" name="Oval 2"/>
+          <p:cNvPr id="3" name="deckgen:decor"/>
           <p:cNvSpPr/>
           <p:nvPr/>
         </p:nvSpPr>
@@ -14348,7 +14348,7 @@
       </p:sp>
       <p:sp>
         <p:nvSpPr>
-          <p:cNvPr id="4" name="Oval 3"/>
+          <p:cNvPr id="4" name="deckgen:decor"/>
           <p:cNvSpPr/>
           <p:nvPr/>
         </p:nvSpPr>
@@ -14554,7 +14554,7 @@
       </p:sp>
       <p:sp>
         <p:nvSpPr>
-          <p:cNvPr id="10" name="TextBox 9"/>
+          <p:cNvPr id="10" name="deckgen:ornament"/>
           <p:cNvSpPr txBox="1"/>
           <p:nvPr/>
         </p:nvSpPr>
@@ -14739,7 +14739,7 @@
       </p:sp>
       <p:sp>
         <p:nvSpPr>
-          <p:cNvPr id="14" name="TextBox 13"/>
+          <p:cNvPr id="14" name="deckgen:ornament"/>
           <p:cNvSpPr txBox="1"/>
           <p:nvPr/>
         </p:nvSpPr>
@@ -14924,7 +14924,7 @@
       </p:sp>
       <p:sp>
         <p:nvSpPr>
-          <p:cNvPr id="18" name="TextBox 17"/>
+          <p:cNvPr id="18" name="deckgen:ornament"/>
           <p:cNvSpPr txBox="1"/>
           <p:nvPr/>
         </p:nvSpPr>
@@ -15109,7 +15109,7 @@
       </p:sp>
       <p:sp>
         <p:nvSpPr>
-          <p:cNvPr id="22" name="TextBox 21"/>
+          <p:cNvPr id="22" name="deckgen:ornament"/>
           <p:cNvSpPr txBox="1"/>
           <p:nvPr/>
         </p:nvSpPr>
